--- a/services/Презентация_предзащита_5мин.pptx
+++ b/services/Презентация_предзащита_5мин.pptx
@@ -4782,7 +4782,7 @@
               </a:defRPr>
             </a:pPr>
             <a:r>
-              <a:t>6. Внешний аналитический модуль — рекомендация режима работы.</a:t>
+              <a:t>6. Внешний аналитический модуль — Python/Prophet, краткосрочный прогноз RPS по телеметрии.</a:t>
             </a:r>
           </a:p>
           <a:p>
@@ -5444,6 +5444,101 @@
             </a:pPr>
             <a:r>
               <a:t>3. Доля отклонённых запросов 429</a:t>
+            </a:r>
+          </a:p>
+          <a:p>
+            <a:pPr>
+              <a:lnSpc>
+                <a:spcPct val="105000"/>
+              </a:lnSpc>
+              <a:spcAft>
+                <a:spcPts val="400"/>
+              </a:spcAft>
+              <a:defRPr sz="1700" b="1">
+                <a:solidFill>
+                  <a:srgbClr val="1F2937"/>
+                </a:solidFill>
+                <a:latin typeface="Arial"/>
+              </a:defRPr>
+            </a:pPr>
+            <a:r>
+              <a:t>Критерии успеха:</a:t>
+            </a:r>
+          </a:p>
+          <a:p>
+            <a:pPr>
+              <a:lnSpc>
+                <a:spcPct val="105000"/>
+              </a:lnSpc>
+              <a:spcAft>
+                <a:spcPts val="400"/>
+              </a:spcAft>
+              <a:defRPr sz="1700" b="0">
+                <a:solidFill>
+                  <a:srgbClr val="1F2937"/>
+                </a:solidFill>
+                <a:latin typeface="Arial"/>
+              </a:defRPr>
+            </a:pPr>
+            <a:r>
+              <a:t>1. В норме — высокая доступность, приемлемая задержка, без критичных 5xx.</a:t>
+            </a:r>
+          </a:p>
+          <a:p>
+            <a:pPr>
+              <a:lnSpc>
+                <a:spcPct val="105000"/>
+              </a:lnSpc>
+              <a:spcAft>
+                <a:spcPts val="400"/>
+              </a:spcAft>
+              <a:defRPr sz="1700" b="0">
+                <a:solidFill>
+                  <a:srgbClr val="1F2937"/>
+                </a:solidFill>
+                <a:latin typeface="Arial"/>
+              </a:defRPr>
+            </a:pPr>
+            <a:r>
+              <a:t>2. В аномалии — рост 429/reject и разгрузка целевого сервиса без срыва прокси.</a:t>
+            </a:r>
+          </a:p>
+          <a:p>
+            <a:pPr>
+              <a:lnSpc>
+                <a:spcPct val="105000"/>
+              </a:lnSpc>
+              <a:spcAft>
+                <a:spcPts val="400"/>
+              </a:spcAft>
+              <a:defRPr sz="1700" b="0">
+                <a:solidFill>
+                  <a:srgbClr val="1F2937"/>
+                </a:solidFill>
+                <a:latin typeface="Arial"/>
+              </a:defRPr>
+            </a:pPr>
+            <a:r>
+              <a:t>3. Для adaptive — реальная схема token -&gt; sliding -&gt; token.</a:t>
+            </a:r>
+          </a:p>
+          <a:p>
+            <a:pPr>
+              <a:lnSpc>
+                <a:spcPct val="105000"/>
+              </a:lnSpc>
+              <a:spcAft>
+                <a:spcPts val="400"/>
+              </a:spcAft>
+              <a:defRPr sz="1700" b="0">
+                <a:solidFill>
+                  <a:srgbClr val="1F2937"/>
+                </a:solidFill>
+                <a:latin typeface="Arial"/>
+              </a:defRPr>
+            </a:pPr>
+            <a:r>
+              <a:t>4. Вывод принимается только по повторам и CI95.</a:t>
             </a:r>
           </a:p>
           <a:p>
